--- a/hw2/deliverables/Презентация_ДЗ2.pptx
+++ b/hw2/deliverables/Презентация_ДЗ2.pptx
@@ -520,11 +520,7 @@
         <p:txBody>
           <a:bodyPr/>
           <a:lstStyle/>
-          <a:p>
-            <a:r>
-              <a:t>Добрый день. Тема нашей работы — влияние рыночного фактора, фактора размера и фактора стоимости на доходность российских акций. Мы взяли 35 акций Московской биржи, данные за десять лет, с 2015 по 2024 год, и сравнили две модели ценообразования: CAPM, где риск один — рыночный, и трёхфакторную модель Фамы–Френча, где к рынку добавляются размер компании и её оценка относительно балансовой стоимости. Главный вопрос: насколько дополнительные факторы улучшают объяснение доходностей и как меняются премии за риск и требуемая доходность по акциям.</a:t>
-            </a:r>
-          </a:p>
+          <a:p/>
         </p:txBody>
       </p:sp>
       <p:sp>
@@ -590,11 +586,7 @@
         <p:txBody>
           <a:bodyPr/>
           <a:lstStyle/>
-          <a:p>
-            <a:r>
-              <a:t>Трёхфакторная модель. На графике — нагрузки каждой акции на три фактора, тёмным выделены значимые. Рыночная бета почти не меняется по сравнению с CAPM, потому что SMB и HML слабо связаны с рынком. Нагрузки на размер и стоимость экономически осмысленны. Как малые компании ведут себя десять бумаг — Банк Санкт-Петербург, Селигдар, HeadHunter, энергетика. Как крупные — Газпром, Алроса и Т-Технологии. Как акции стоимости — банки, энергетика, Башнефть и Газпром: низкая цена к балансу, зрелый бизнес, зависимость от государства и ставок. Как акции роста — HeadHunter, Ozon, Ренессанс, Норникель и Алроса: за их перспективы рынок платит премию к балансу. Значимые нагрузки на размер есть у 13 акций, на стоимость — у 12, то есть у трети выборки.</a:t>
-            </a:r>
-          </a:p>
+          <a:p/>
         </p:txBody>
       </p:sp>
       <p:sp>
@@ -660,11 +652,7 @@
         <p:txBody>
           <a:bodyPr/>
           <a:lstStyle/>
-          <a:p>
-            <a:r>
-              <a:t>Сравнение моделей. Трёхфакторная модель объясняет доходности лучше: средний скорректированный R квадрат растёт с 0,37 до 0,41, средняя абсолютная альфа — ошибка ценообразования — падает с 9,8 до 8,1 процентного пункта годовых. Сильнее всего выигрывают малые компании и бумаги с выраженным профилем стоимости или роста: у Банка Санкт-Петербург R квадрат растёт с 0,32 до 0,50, у HeadHunter — с 0,39 до 0,55. Совместный тест Гиббонса–Росса–Шанкена на 27 акциях с полной историей отвергает обе модели на пятипроцентном уровне: альфы совместно не равны нулю. Но статистика для модели Фамы–Френча меньше, p-value выше — она ближе к цели. Как и на американских данных, трёх факторов недостаточно, чтобы полностью объяснить доходности.</a:t>
-            </a:r>
-          </a:p>
+          <a:p/>
         </p:txBody>
       </p:sp>
       <p:sp>
@@ -730,11 +718,7 @@
         <p:txBody>
           <a:bodyPr/>
           <a:lstStyle/>
-          <a:p>
-            <a:r>
-              <a:t>Это ключевой результат работы. На лекции был пример: управляющий по CAPM показывает значимую альфу, а в модели Фамы–Френча она исчезает, потому что это была премия за размер и стоимость. Мы получили то же самое на российских данных. У Банка Санкт-Петербург альфа по CAPM 26,6 процента годовых и значима. В трёхфакторной модели она снижается до 18 процентов и теряет значимость: банк — малая акция стоимости, и часть его доходности — плата за эти риски. У HeadHunter альфа падает с 36 до 10 процентов. А вот у ВТБ отрицательная альфа остаётся и даже усиливается: акционеры ВТБ проиграли из-за размывания доли при допэмиссиях — это специфический риск компании, факторы его не объясняют. На графиках справа — R квадрат и альфы всех 35 акций в двух моделях.</a:t>
-            </a:r>
-          </a:p>
+          <a:p/>
         </p:txBody>
       </p:sp>
       <p:sp>
@@ -800,11 +784,7 @@
         <p:txBody>
           <a:bodyPr/>
           <a:lstStyle/>
-          <a:p>
-            <a:r>
-              <a:t>Процедура Фамы–Макбета отвечает на вопрос, сколько рынок платит за единицу каждого риска. Беты мы взяли из временных регрессий, а затем каждый месяц регрессировали доходности всех акций на их беты и усреднили коэффициенты. Результат: константы близки к нулю, как и должно быть, а знаки премий совпадают со средними доходностями факторов — плюс за рынок, плюс за размер, минус за стоимость. Но все премии статистически незначимы. На 35 отдельных акциях и десяти годах очень волатильного рынка точно оценить цену риска нельзя. Поэтому для расчёта премий за риск мы используем средние доходности факторов — это стандартный подход для торгуемых факторов, — а Фаму–Макбета рассматриваем как проверку знаков.</a:t>
-            </a:r>
-          </a:p>
+          <a:p/>
         </p:txBody>
       </p:sp>
       <p:sp>
@@ -870,11 +850,7 @@
         <p:txBody>
           <a:bodyPr/>
           <a:lstStyle/>
-          <a:p>
-            <a:r>
-              <a:t>Теперь главный вопрос задания — сравнение премий за риск. Премия акции равна сумме произведений её бет на премии факторов, а премии факторов — их средние доходности за 2015–2024 годы. На графике синим — премия по CAPM, оранжевым — по Фаме–Френчу, чёрными отметками — фактическая избыточная доходность. Картина разделяется на две группы. Для малых компаний трёхфакторная модель даёт премию заметно выше: HeadHunter — на 16 процентных пунктов, Селигдар — на 12, Банк Санкт-Петербург — на 9, Ozon — на 7. CAPM не видит премию за размер и записывает её в альфу. Для крупных компаний, наоборот, Фама–Френч даёт премию ниже, до минус 4 пунктов у Газпрома: это крупные бумаги с отрицательной нагрузкой на SMB. Важная оговорка: премия за размер почти 18 процентов годовых держится во многом на одном 2023 годе, поэтому в прогноз её нужно брать консервативнее.</a:t>
-            </a:r>
-          </a:p>
+          <a:p/>
         </p:txBody>
       </p:sp>
       <p:sp>
@@ -940,11 +916,7 @@
         <p:txBody>
           <a:bodyPr/>
           <a:lstStyle/>
-          <a:p>
-            <a:r>
-              <a:t>Чтобы перейти к рекомендациям, считаем требуемую доходность, то есть стоимость капитала, на сегодня. Безрисковая ставка — доходность годовых ОФЗ на конец сентября 2026 года, 13,72 процента: инвестор принимает решение сейчас, а не по средней ставке за десять лет. К ней прибавляем премию за риск. Для крупных компаний — Сбербанк, Лукойл, Роснефть — модели дают близкие оценки, в пределах 2–3 пунктов. Для малых расхождение огромное: Банк Санкт-Петербург — 19 процентов по CAPM против 27 по Фаме–Френчу, Селигдар — 19 против 31, HeadHunter — 22 против 39. В правой колонке для сравнения — фактическая средняя избыточная доходность за период: у Банка Санкт-Петербург, Селигдара и HeadHunter она гораздо ближе к оценке Фамы–Френча.</a:t>
-            </a:r>
-          </a:p>
+          <a:p/>
         </p:txBody>
       </p:sp>
       <p:sp>
@@ -1010,11 +982,7 @@
         <p:txBody>
           <a:bodyPr/>
           <a:lstStyle/>
-          <a:p>
-            <a:r>
-              <a:t>Мы проверили, не зависят ли выводы от наших допущений. Если заменить RUONIA на трёхмесячные ОФЗ, результаты почти не меняются: беты и R квадрат те же, альфы сдвигаются на десятые доли пункта. Значит, важен не выбор конкретной ставки, а то, что она меняется во времени. Если убрать дивиденды, ошибки ценообразования растут и значимых альф становится больше — это подтверждает, что считать полную доходность было правильно. С рыночным фактором РАНХиГС R квадрат заметно ниже: их широкий рынок с ограничением веса компании и безрисковой ставкой по RGBI хуже описывает наши крупные бумаги. И на полном периоде до сентября 2026 года CAPM даёт те же беты. Во всех вариантах трёхфакторная модель лучше CAPM.</a:t>
-            </a:r>
-          </a:p>
+          <a:p/>
         </p:txBody>
       </p:sp>
       <p:sp>
@@ -1080,11 +1048,7 @@
         <p:txBody>
           <a:bodyPr/>
           <a:lstStyle/>
-          <a:p>
-            <a:r>
-              <a:t>Четвёртый вопрос задания — какие ещё факторы можно добавить. По литературе главные кандидаты: моментум Кархарта — акции-победители последних 12 месяцев продолжают расти; ликвидность по Амихуду и Пастору–Стамбо — для бумаг второго эшелона это важно; прибыльность и инвестиции из пятифакторной модели Фамы–Френча 2015 года; макрофакторы по Чену, Роллу и Россу — для России это прежде всего цена нефти и курс рубля; и фактор государственной собственности, который считает РАНХиГС. Моментум и ликвидность мы проверили на своих данных: скорректированный R квадрат растёт лишь с 0,406 до 0,413, значимые нагрузки на моментум у четырёх акций, на ликвидность — у двух. Основную часть систематического риска уже покрывают рынок, размер и стоимость.</a:t>
-            </a:r>
-          </a:p>
+          <a:p/>
         </p:txBody>
       </p:sp>
       <p:sp>
@@ -1150,11 +1114,7 @@
         <p:txBody>
           <a:bodyPr/>
           <a:lstStyle/>
-          <a:p>
-            <a:r>
-              <a:t>Пятый вопрос — альтернативные многофакторные модели. Первая — пятифакторная модель Фамы–Френча с прибыльностью и инвестициями. Она могла бы объяснить устойчиво отрицательные альфы ВТБ и Юнипро: у компаний со слабой прибыльностью и агрессивными инвестициями или допэмиссиями доходность исторически ниже. Вторая — q-модель Хоу, Сюэ и Чжана, похожая по факторам, но выведенная из теории производства. Третья — условная CAPM и модели со скользящими бетами: на российском рынке был структурный слом 2022 года, и беты до и после него различаются. Четвёртая — макроэкономическая версия APT: для сырьевой экономики «плохие времена» — это падение нефти, ослабление рубля и рост ключевой ставки, и такие факторы могут объяснить то, что не ловят портфельные факторы.</a:t>
-            </a:r>
-          </a:p>
+          <a:p/>
         </p:txBody>
       </p:sp>
       <p:sp>
@@ -1220,11 +1180,7 @@
         <p:txBody>
           <a:bodyPr/>
           <a:lstStyle/>
-          <a:p>
-            <a:r>
-              <a:t>Рекомендации. Первое: для крупных ликвидных бумаг — Сбербанк, Лукойл, Роснефть, Газпром — достаточно CAPM, она даже немного завышает стоимость капитала. Второе: для малых компаний и бумаг с выраженным профилем роста или стоимости нужна трёхфакторная модель, иначе стоимость капитала занижена на 4–16 процентных пунктов — а это прямая ошибка в оценке компании методом DCF. Третье: альфу управляющего или инвестидеи нужно проверять многофакторной моделью — высокая доходность Банка Санкт-Петербург и HeadHunter во многом плата за размер и стоимость. Четвёртое: единственная значимая положительная альфа в модели Фамы–Френча у Сбербанка, около 13 процентов годовых, но на границе значимости; ВТБ и Юнипро с отрицательной альфой при прочих равных стоит недовешивать. Пятое: для защитного портфеля подходят бумаги с низкой бетой, для ставки на рост рынка — с высокой.</a:t>
-            </a:r>
-          </a:p>
+          <a:p/>
         </p:txBody>
       </p:sp>
       <p:sp>
@@ -1290,11 +1246,7 @@
         <p:txBody>
           <a:bodyPr/>
           <a:lstStyle/>
-          <a:p>
-            <a:r>
-              <a:t>Цель работы — оценить, насколько три фактора — рынок, размер и стоимость — объясняют доходности российских акций, и сравнить премии за риск по двум моделям. Задание состоит из шести вопросов, и на слайде видно, где в презентации ответ на каждый. Сначала расскажу о выборке и данных, затем о методологии, потом о результатах регрессий, о премиях за риск, о дополнительных факторах и альтернативных моделях, и в конце — рекомендации, выводы и слабые стороны работы. Все расчёты сделаны в Python, ноутбук с комментариями приложен к работе.</a:t>
-            </a:r>
-          </a:p>
+          <a:p/>
         </p:txBody>
       </p:sp>
       <p:sp>
@@ -1360,11 +1312,7 @@
         <p:txBody>
           <a:bodyPr/>
           <a:lstStyle/>
-          <a:p>
-            <a:r>
-              <a:t>Подведу итог. Первое: рыночный фактор объясняет около 38 процентов колебаний доходности российских акций, добавление факторов размера и стоимости повышает эту долю до 42 процентов и снижает ошибки ценообразования на 1,7 пункта в год. Второе: нагрузки на размер и стоимость значимы у трети выборки и экономически осмысленны — малые банки и энергетика ведут себя как малые компании, банки и энергетика — как акции стоимости, IT — как акции роста. Третье: для малых компаний CAPM занижает премию за риск до 16 процентных пунктов. Совместный тест отвергает обе модели, но трёхфакторная модель заметно ближе к цели, и эти выводы устойчивы к выбору безрисковой ставки, к учёту дивидендов и к периоду.</a:t>
-            </a:r>
-          </a:p>
+          <a:p/>
         </p:txBody>
       </p:sp>
       <p:sp>
@@ -1430,11 +1378,7 @@
         <p:txBody>
           <a:bodyPr/>
           <a:lstStyle/>
-          <a:p>
-            <a:r>
-              <a:t>И в завершение — слабые стороны работы, которые мы сами видим. Первое: факторы РАНХиГС доступны только до декабря 2024 года, поэтому 2025–2026 годы не вошли в трёхфакторную модель; решение — построить SMB и HML самостоятельно по данным биржи и отчётности. Второе: мы тестировали отдельные акции, а не портфели, поэтому беты шумные и Фама–Макбет незначим; правильнее использовать тестовые портфели по размеру и B/M и поправку Шанкена. Третье: премии факторов неустойчивы — премия за размер держится на 2023 годе, премия рынка незначима, поэтому оценки требуемой доходности приблизительны. Четвёртое: беты считаются постоянными, хотя в 2022 году был структурный слом. Пятое: у части бумаг короткая история. Шестое: данные из разных источников. Спасибо за внимание, готовы ответить на вопросы.</a:t>
-            </a:r>
-          </a:p>
+          <a:p/>
         </p:txBody>
       </p:sp>
       <p:sp>
@@ -1500,11 +1444,7 @@
         <p:txBody>
           <a:bodyPr/>
           <a:lstStyle/>
-          <a:p>
-            <a:r>
-              <a:t>Выборка — 35 акций. Это 15 бумаг из первого домашнего задания и 20 крупнейших по капитализации и ликвидности акций Мосбиржи. Принцип отбора простой: факторы размера и стоимости могут проявиться, только если акции различаются по размеру и по оценке. Поэтому в выборке есть и гиганты — Сбербанк, Лукойл, Газпром, — и бумаги второго эшелона — Ренессанс Страхование, Мосэнергосбыт, Юнипро, МКБ. Есть типичные «акции стоимости» с низким отношением цены к балансу — банки, энергетика, нефть, — и «акции роста» — HeadHunter, Ozon, Яндекс. Общее у всех бумаг: одна площадка, рубли, все входят или входили в индекс Мосбиржи, и по всем есть история дивидендов. Различаются они отраслью, размером, дивидендной политикой и долей государства.</a:t>
-            </a:r>
-          </a:p>
+          <a:p/>
         </p:txBody>
       </p:sp>
       <p:sp>
@@ -1570,11 +1510,7 @@
         <p:txBody>
           <a:bodyPr/>
           <a:lstStyle/>
-          <a:p>
-            <a:r>
-              <a:t>Данные. Цены и индексы мы скачали напрямую с Московской биржи, дивиденды — с dohod.ru со сверкой на smart-lab, безрисковую ставку и кривую ОФЗ — с сайта Банка России, факторы размера и стоимости — из проекта CAPM-RU Абрамова в РАНХиГС. Важное решение: доходности считаются с учётом дивидендов. У российских акций дивиденды дают до 11–12 процентов годовых, без них доходность занижена, а в месяц отсечки цена падает, и регрессия видит в этом убыток. Дивиденд мы относим к месяцу экс-дивидендной даты, с учётом перехода биржи с режима T+2 на T+1 в 2023 году. Переименованные бумаги склеены, восемь месяцев без торгов X5 исключены. Факторы РАНХиГС заканчиваются в декабре 2024 года, поэтому основной период — со 2015 по 2024 год, 119 месяцев.</a:t>
-            </a:r>
-          </a:p>
+          <a:p/>
         </p:txBody>
       </p:sp>
       <p:sp>
@@ -1640,11 +1576,7 @@
         <p:txBody>
           <a:bodyPr/>
           <a:lstStyle/>
-          <a:p>
-            <a:r>
-              <a:t>Безрисковая ставка. Ключевая ставка за период менялась от 4,25 до 21 процента, поэтому одна средняя ставка на весь период исказила бы избыточные доходности: в 2020–2021 годах занизила бы их, в 2024-м — завысила примерно на 10 процентных пунктов годовых. Мы берём свою ставку на каждый месяц — доходность RUONIA, ставки овернайт, капитализированную за месяц. Это аналог одномесячных казначейских векселей, которые используют Фама и Френч. Отдельно мы проверили, как это делает РАНХиГС: у них безрисковая ставка — месячное изменение ценового индекса ОФЗ RGBI. Он падал в 56 месяцах из 119, в феврале 2022 года — на 16 процентов, и без купонов растёт в среднем на 0,05 процента в месяц. Это рисковый актив, а не безрисковая ставка. Как проверку устойчивости мы используем доходность трёхмесячных ОФЗ с кривой ЦБ.</a:t>
-            </a:r>
-          </a:p>
+          <a:p/>
         </p:txBody>
       </p:sp>
       <p:sp>
@@ -1710,11 +1642,7 @@
         <p:txBody>
           <a:bodyPr/>
           <a:lstStyle/>
-          <a:p>
-            <a:r>
-              <a:t>Рыночный фактор мы строим сами: доходность индекса полной доходности MCFTR минус RUONIA. MCFTR включает реинвестированные дивиденды, поэтому согласуется с доходностями акций. На графике видно, что MCFTR обгоняет обычный индекс Мосбиржи примерно на 7 процентов в год — это и есть дивиденды. Главное наблюдение: премия рынка над безрисковой ставкой за 2015–2024 годы — около 5 процентов годовых, и она статистически незначима. Высокие ставки ЦБ и обвал 2022 года съели большую часть превышения акций над депозитом, а в 2025–2026 годах рынок с дивидендами и вовсе отстал от RUONIA. Это важно для дальнейшего: от рыночной премии зависят все оценки ожидаемой доходности по CAPM.</a:t>
-            </a:r>
-          </a:p>
+          <a:p/>
         </p:txBody>
       </p:sp>
       <p:sp>
@@ -1780,11 +1708,7 @@
         <p:txBody>
           <a:bodyPr/>
           <a:lstStyle/>
-          <a:p>
-            <a:r>
-              <a:t>Три фактора модели. Рынок мы построили сами, SMB и HML взяты у РАНХиГС в версии с дивидендами. SMB — это доходность портфеля малых компаний минус доходность крупных, HML — акций с высоким отношением балансовой стоимости к рыночной минус акций с низким. Безрисковая ставка в этих разностях сокращается, поэтому их можно брать как есть. Результат: малые компании в среднем обгоняли крупные почти на 18 процентов годовых, и это значимо — но во многом за счёт 2023 года, когда SMB за год вырос на 137 процентов. Фактор стоимости в России за десятилетие был отрицательным и незначимым — акции стоимости не обогнали акции роста. Корреляции между факторами низкие, так что мультиколлинеарности в регрессиях нет.</a:t>
-            </a:r>
-          </a:p>
+          <a:p/>
         </p:txBody>
       </p:sp>
       <p:sp>
@@ -1850,11 +1774,7 @@
         <p:txBody>
           <a:bodyPr/>
           <a:lstStyle/>
-          <a:p>
-            <a:r>
-              <a:t>Методология в четыре шага. Первый — временные регрессии: для каждой акции отдельно регрессируем её месячную избыточную доходность на факторы. В CAPM фактор один — рынок, в модели Фамы–Френча три. Беты показывают количество риска, альфа — среднюю доходность, которую факторы не объясняют; если модель верна, альфа равна нулю. Стандартные ошибки — Ньюи–Уэста, они устойчивы к гетероскедастичности и автокорреляции, что важно для кризисных месяцев. Второй шаг — сравниваем модели по R квадрат, по средней абсолютной альфе и совместным тестом Гиббонса–Росса–Шанкена. Третий — процедура Фамы–Макбета: оцениваем, сколько рынок платит за единицу каждого риска. Четвёртый — считаем премии за риск как беты, умноженные на премии факторов, и требуемую доходность от текущей безрисковой ставки — доходности годовых ОФЗ, 13,72 процента на конец сентября 2026 года.</a:t>
-            </a:r>
-          </a:p>
+          <a:p/>
         </p:txBody>
       </p:sp>
       <p:sp>
@@ -1920,11 +1840,7 @@
         <p:txBody>
           <a:bodyPr/>
           <a:lstStyle/>
-          <a:p>
-            <a:r>
-              <a:t>Результаты CAPM. Все беты положительны и значимы, от 0,55 у МКБ до 1,66 у HeadHunter. Выше рынка — компании роста и крупнейшие банки и нефтяники: HeadHunter, Ozon, Т-Технологии, Мечел, Роснефть, Сбербанк. Ниже рынка — защитные бумаги: МКБ, привилегированные Сургутнефтегаза с дивидендной формулой, Полюс — золото дорожает в кризис, — Интер РАО, РусГидро, Ростелеком. Средний R квадрат 0,38: рынок объясняет примерно треть колебаний доходности отдельной акции, остальное — специфический риск. Альфы в большинстве незначимы, то есть для большинства акций CAPM не отвергается. Исключения: Банк Санкт-Петербург и HeadHunter с положительной альфой и ВТБ с отрицательной.</a:t>
-            </a:r>
-          </a:p>
+          <a:p/>
         </p:txBody>
       </p:sp>
       <p:sp>

--- a/hw2/deliverables/Презентация_ДЗ2.pptx
+++ b/hw2/deliverables/Презентация_ДЗ2.pptx
@@ -26,6 +26,7 @@
     <p:sldId id="274" r:id="rId26"/>
     <p:sldId id="275" r:id="rId27"/>
     <p:sldId id="276" r:id="rId28"/>
+    <p:sldId id="277" r:id="rId29"/>
   </p:sldIdLst>
   <p:sldSz cx="12192000" cy="6858000" type="screen4x3"/>
   <p:notesSz cx="6858000" cy="9144000"/>
@@ -1336,6 +1337,72 @@
 </file>
 
 <file path=ppt/notesSlides/notesSlide21.xml><?xml version="1.0" encoding="utf-8"?>
+<p:notes xmlns:a="http://schemas.openxmlformats.org/drawingml/2006/main" xmlns:p="http://schemas.openxmlformats.org/presentationml/2006/main" xmlns:r="http://schemas.openxmlformats.org/officeDocument/2006/relationships">
+  <p:cSld>
+    <p:spTree>
+      <p:nvGrpSpPr>
+        <p:cNvPr id="1" name=""/>
+        <p:cNvGrpSpPr/>
+        <p:nvPr/>
+      </p:nvGrpSpPr>
+      <p:grpSpPr>
+        <a:xfrm>
+          <a:off x="0" y="0"/>
+          <a:ext cx="0" cy="0"/>
+          <a:chOff x="0" y="0"/>
+          <a:chExt cx="0" cy="0"/>
+        </a:xfrm>
+      </p:grpSpPr>
+      <p:sp>
+        <p:nvSpPr>
+          <p:cNvPr id="2" name="Slide Image Placeholder 1"/>
+          <p:cNvSpPr>
+            <a:spLocks noGrp="1"/>
+          </p:cNvSpPr>
+          <p:nvPr>
+            <p:ph type="sldImg" idx="2"/>
+          </p:nvPr>
+        </p:nvSpPr>
+        <p:spPr/>
+      </p:sp>
+      <p:sp>
+        <p:nvSpPr>
+          <p:cNvPr id="3" name="Notes Placeholder 2"/>
+          <p:cNvSpPr>
+            <a:spLocks noGrp="1"/>
+          </p:cNvSpPr>
+          <p:nvPr>
+            <p:ph type="body" idx="3" sz="quarter"/>
+          </p:nvPr>
+        </p:nvSpPr>
+        <p:spPr/>
+        <p:txBody>
+          <a:bodyPr/>
+          <a:lstStyle/>
+          <a:p/>
+        </p:txBody>
+      </p:sp>
+      <p:sp>
+        <p:nvSpPr>
+          <p:cNvPr id="4" name="Slide Number Placeholder 3"/>
+          <p:cNvSpPr>
+            <a:spLocks noGrp="1"/>
+          </p:cNvSpPr>
+          <p:nvPr>
+            <p:ph type="sldNum" idx="5" sz="quarter"/>
+          </p:nvPr>
+        </p:nvSpPr>
+        <p:spPr/>
+      </p:sp>
+    </p:spTree>
+  </p:cSld>
+  <p:clrMapOvr>
+    <a:masterClrMapping/>
+  </p:clrMapOvr>
+</p:notes>
+</file>
+
+<file path=ppt/notesSlides/notesSlide22.xml><?xml version="1.0" encoding="utf-8"?>
 <p:notes xmlns:a="http://schemas.openxmlformats.org/drawingml/2006/main" xmlns:p="http://schemas.openxmlformats.org/presentationml/2006/main" xmlns:r="http://schemas.openxmlformats.org/officeDocument/2006/relationships">
   <p:cSld>
     <p:spTree>
@@ -4888,7 +4955,7 @@
       <p:grpSpPr/>
       <p:pic>
         <p:nvPicPr>
-          <p:cNvPr id="2" name="Picture 1" descr="10_ff3.png"/>
+          <p:cNvPr id="2" name="Picture 1" descr="10_capm.png"/>
           <p:cNvPicPr>
             <a:picLocks noChangeAspect="1"/>
           </p:cNvPicPr>
@@ -4930,7 +4997,7 @@
       <p:grpSpPr/>
       <p:pic>
         <p:nvPicPr>
-          <p:cNvPr id="2" name="Picture 1" descr="11_compare.png"/>
+          <p:cNvPr id="2" name="Picture 1" descr="11_ff3.png"/>
           <p:cNvPicPr>
             <a:picLocks noChangeAspect="1"/>
           </p:cNvPicPr>
@@ -4972,7 +5039,7 @@
       <p:grpSpPr/>
       <p:pic>
         <p:nvPicPr>
-          <p:cNvPr id="2" name="Picture 1" descr="12_bspb.png"/>
+          <p:cNvPr id="2" name="Picture 1" descr="12_fm.png"/>
           <p:cNvPicPr>
             <a:picLocks noChangeAspect="1"/>
           </p:cNvPicPr>
@@ -5014,7 +5081,7 @@
       <p:grpSpPr/>
       <p:pic>
         <p:nvPicPr>
-          <p:cNvPr id="2" name="Picture 1" descr="13_fm.png"/>
+          <p:cNvPr id="2" name="Picture 1" descr="13_compare.png"/>
           <p:cNvPicPr>
             <a:picLocks noChangeAspect="1"/>
           </p:cNvPicPr>
@@ -5056,7 +5123,7 @@
       <p:grpSpPr/>
       <p:pic>
         <p:nvPicPr>
-          <p:cNvPr id="2" name="Picture 1" descr="14_premia.png"/>
+          <p:cNvPr id="2" name="Picture 1" descr="14_bspb.png"/>
           <p:cNvPicPr>
             <a:picLocks noChangeAspect="1"/>
           </p:cNvPicPr>
@@ -5098,7 +5165,7 @@
       <p:grpSpPr/>
       <p:pic>
         <p:nvPicPr>
-          <p:cNvPr id="2" name="Picture 1" descr="15_required.png"/>
+          <p:cNvPr id="2" name="Picture 1" descr="15_premia.png"/>
           <p:cNvPicPr>
             <a:picLocks noChangeAspect="1"/>
           </p:cNvPicPr>
@@ -5140,7 +5207,7 @@
       <p:grpSpPr/>
       <p:pic>
         <p:nvPicPr>
-          <p:cNvPr id="2" name="Picture 1" descr="16_robust.png"/>
+          <p:cNvPr id="2" name="Picture 1" descr="16_required.png"/>
           <p:cNvPicPr>
             <a:picLocks noChangeAspect="1"/>
           </p:cNvPicPr>
@@ -5182,7 +5249,7 @@
       <p:grpSpPr/>
       <p:pic>
         <p:nvPicPr>
-          <p:cNvPr id="2" name="Picture 1" descr="17_extra.png"/>
+          <p:cNvPr id="2" name="Picture 1" descr="17_robust.png"/>
           <p:cNvPicPr>
             <a:picLocks noChangeAspect="1"/>
           </p:cNvPicPr>
@@ -5224,7 +5291,7 @@
       <p:grpSpPr/>
       <p:pic>
         <p:nvPicPr>
-          <p:cNvPr id="2" name="Picture 1" descr="18_models.png"/>
+          <p:cNvPr id="2" name="Picture 1" descr="18_extra.png"/>
           <p:cNvPicPr>
             <a:picLocks noChangeAspect="1"/>
           </p:cNvPicPr>
@@ -5266,7 +5333,7 @@
       <p:grpSpPr/>
       <p:pic>
         <p:nvPicPr>
-          <p:cNvPr id="2" name="Picture 1" descr="19_recs.png"/>
+          <p:cNvPr id="2" name="Picture 1" descr="19_models.png"/>
           <p:cNvPicPr>
             <a:picLocks noChangeAspect="1"/>
           </p:cNvPicPr>
@@ -5350,7 +5417,7 @@
       <p:grpSpPr/>
       <p:pic>
         <p:nvPicPr>
-          <p:cNvPr id="2" name="Picture 1" descr="20_concl.png"/>
+          <p:cNvPr id="2" name="Picture 1" descr="20_recs.png"/>
           <p:cNvPicPr>
             <a:picLocks noChangeAspect="1"/>
           </p:cNvPicPr>
@@ -5392,7 +5459,49 @@
       <p:grpSpPr/>
       <p:pic>
         <p:nvPicPr>
-          <p:cNvPr id="2" name="Picture 1" descr="21_limits.png"/>
+          <p:cNvPr id="2" name="Picture 1" descr="21_concl.png"/>
+          <p:cNvPicPr>
+            <a:picLocks noChangeAspect="1"/>
+          </p:cNvPicPr>
+          <p:nvPr/>
+        </p:nvPicPr>
+        <p:blipFill>
+          <a:blip r:embed="rId2"/>
+          <a:stretch>
+            <a:fillRect/>
+          </a:stretch>
+        </p:blipFill>
+        <p:spPr>
+          <a:xfrm>
+            <a:off x="0" y="0"/>
+            <a:ext cx="12192000" cy="6858000"/>
+          </a:xfrm>
+          <a:prstGeom prst="rect">
+            <a:avLst/>
+          </a:prstGeom>
+        </p:spPr>
+      </p:pic>
+    </p:spTree>
+  </p:cSld>
+  <p:clrMapOvr>
+    <a:masterClrMapping/>
+  </p:clrMapOvr>
+</p:sld>
+</file>
+
+<file path=ppt/slides/slide22.xml><?xml version="1.0" encoding="utf-8"?>
+<p:sld xmlns:a="http://schemas.openxmlformats.org/drawingml/2006/main" xmlns:p="http://schemas.openxmlformats.org/presentationml/2006/main" xmlns:r="http://schemas.openxmlformats.org/officeDocument/2006/relationships">
+  <p:cSld>
+    <p:spTree>
+      <p:nvGrpSpPr>
+        <p:cNvPr id="1" name=""/>
+        <p:cNvGrpSpPr/>
+        <p:nvPr/>
+      </p:nvGrpSpPr>
+      <p:grpSpPr/>
+      <p:pic>
+        <p:nvPicPr>
+          <p:cNvPr id="2" name="Picture 1" descr="22_limits.png"/>
           <p:cNvPicPr>
             <a:picLocks noChangeAspect="1"/>
           </p:cNvPicPr>
@@ -5434,7 +5543,7 @@
       <p:grpSpPr/>
       <p:pic>
         <p:nvPicPr>
-          <p:cNvPr id="2" name="Picture 1" descr="03_sample.png"/>
+          <p:cNvPr id="2" name="Picture 1" descr="03_agenda.png"/>
           <p:cNvPicPr>
             <a:picLocks noChangeAspect="1"/>
           </p:cNvPicPr>
@@ -5476,7 +5585,7 @@
       <p:grpSpPr/>
       <p:pic>
         <p:nvPicPr>
-          <p:cNvPr id="2" name="Picture 1" descr="04_data.png"/>
+          <p:cNvPr id="2" name="Picture 1" descr="04_sample.png"/>
           <p:cNvPicPr>
             <a:picLocks noChangeAspect="1"/>
           </p:cNvPicPr>
@@ -5518,7 +5627,7 @@
       <p:grpSpPr/>
       <p:pic>
         <p:nvPicPr>
-          <p:cNvPr id="2" name="Picture 1" descr="05_rf.png"/>
+          <p:cNvPr id="2" name="Picture 1" descr="05_method.png"/>
           <p:cNvPicPr>
             <a:picLocks noChangeAspect="1"/>
           </p:cNvPicPr>
@@ -5560,7 +5669,7 @@
       <p:grpSpPr/>
       <p:pic>
         <p:nvPicPr>
-          <p:cNvPr id="2" name="Picture 1" descr="06_market.png"/>
+          <p:cNvPr id="2" name="Picture 1" descr="06_data.png"/>
           <p:cNvPicPr>
             <a:picLocks noChangeAspect="1"/>
           </p:cNvPicPr>
@@ -5602,7 +5711,7 @@
       <p:grpSpPr/>
       <p:pic>
         <p:nvPicPr>
-          <p:cNvPr id="2" name="Picture 1" descr="07_factors.png"/>
+          <p:cNvPr id="2" name="Picture 1" descr="07_rf.png"/>
           <p:cNvPicPr>
             <a:picLocks noChangeAspect="1"/>
           </p:cNvPicPr>
@@ -5644,7 +5753,7 @@
       <p:grpSpPr/>
       <p:pic>
         <p:nvPicPr>
-          <p:cNvPr id="2" name="Picture 1" descr="08_method.png"/>
+          <p:cNvPr id="2" name="Picture 1" descr="08_market.png"/>
           <p:cNvPicPr>
             <a:picLocks noChangeAspect="1"/>
           </p:cNvPicPr>
@@ -5686,7 +5795,7 @@
       <p:grpSpPr/>
       <p:pic>
         <p:nvPicPr>
-          <p:cNvPr id="2" name="Picture 1" descr="09_capm.png"/>
+          <p:cNvPr id="2" name="Picture 1" descr="09_factors.png"/>
           <p:cNvPicPr>
             <a:picLocks noChangeAspect="1"/>
           </p:cNvPicPr>

--- a/hw2/deliverables/Презентация_ДЗ2.pptx
+++ b/hw2/deliverables/Презентация_ДЗ2.pptx
@@ -27,6 +27,7 @@
     <p:sldId id="275" r:id="rId27"/>
     <p:sldId id="276" r:id="rId28"/>
     <p:sldId id="277" r:id="rId29"/>
+    <p:sldId id="278" r:id="rId30"/>
   </p:sldIdLst>
   <p:sldSz cx="12192000" cy="6858000" type="screen4x3"/>
   <p:notesSz cx="6858000" cy="9144000"/>
@@ -1403,6 +1404,72 @@
 </file>
 
 <file path=ppt/notesSlides/notesSlide22.xml><?xml version="1.0" encoding="utf-8"?>
+<p:notes xmlns:a="http://schemas.openxmlformats.org/drawingml/2006/main" xmlns:p="http://schemas.openxmlformats.org/presentationml/2006/main" xmlns:r="http://schemas.openxmlformats.org/officeDocument/2006/relationships">
+  <p:cSld>
+    <p:spTree>
+      <p:nvGrpSpPr>
+        <p:cNvPr id="1" name=""/>
+        <p:cNvGrpSpPr/>
+        <p:nvPr/>
+      </p:nvGrpSpPr>
+      <p:grpSpPr>
+        <a:xfrm>
+          <a:off x="0" y="0"/>
+          <a:ext cx="0" cy="0"/>
+          <a:chOff x="0" y="0"/>
+          <a:chExt cx="0" cy="0"/>
+        </a:xfrm>
+      </p:grpSpPr>
+      <p:sp>
+        <p:nvSpPr>
+          <p:cNvPr id="2" name="Slide Image Placeholder 1"/>
+          <p:cNvSpPr>
+            <a:spLocks noGrp="1"/>
+          </p:cNvSpPr>
+          <p:nvPr>
+            <p:ph type="sldImg" idx="2"/>
+          </p:nvPr>
+        </p:nvSpPr>
+        <p:spPr/>
+      </p:sp>
+      <p:sp>
+        <p:nvSpPr>
+          <p:cNvPr id="3" name="Notes Placeholder 2"/>
+          <p:cNvSpPr>
+            <a:spLocks noGrp="1"/>
+          </p:cNvSpPr>
+          <p:nvPr>
+            <p:ph type="body" idx="3" sz="quarter"/>
+          </p:nvPr>
+        </p:nvSpPr>
+        <p:spPr/>
+        <p:txBody>
+          <a:bodyPr/>
+          <a:lstStyle/>
+          <a:p/>
+        </p:txBody>
+      </p:sp>
+      <p:sp>
+        <p:nvSpPr>
+          <p:cNvPr id="4" name="Slide Number Placeholder 3"/>
+          <p:cNvSpPr>
+            <a:spLocks noGrp="1"/>
+          </p:cNvSpPr>
+          <p:nvPr>
+            <p:ph type="sldNum" idx="5" sz="quarter"/>
+          </p:nvPr>
+        </p:nvSpPr>
+        <p:spPr/>
+      </p:sp>
+    </p:spTree>
+  </p:cSld>
+  <p:clrMapOvr>
+    <a:masterClrMapping/>
+  </p:clrMapOvr>
+</p:notes>
+</file>
+
+<file path=ppt/notesSlides/notesSlide23.xml><?xml version="1.0" encoding="utf-8"?>
 <p:notes xmlns:a="http://schemas.openxmlformats.org/drawingml/2006/main" xmlns:p="http://schemas.openxmlformats.org/presentationml/2006/main" xmlns:r="http://schemas.openxmlformats.org/officeDocument/2006/relationships">
   <p:cSld>
     <p:spTree>
@@ -5123,7 +5190,7 @@
       <p:grpSpPr/>
       <p:pic>
         <p:nvPicPr>
-          <p:cNvPr id="2" name="Picture 1" descr="14_bspb.png"/>
+          <p:cNvPr id="2" name="Picture 1" descr="14_hw1.png"/>
           <p:cNvPicPr>
             <a:picLocks noChangeAspect="1"/>
           </p:cNvPicPr>
@@ -5165,7 +5232,7 @@
       <p:grpSpPr/>
       <p:pic>
         <p:nvPicPr>
-          <p:cNvPr id="2" name="Picture 1" descr="15_premia.png"/>
+          <p:cNvPr id="2" name="Picture 1" descr="15_bspb.png"/>
           <p:cNvPicPr>
             <a:picLocks noChangeAspect="1"/>
           </p:cNvPicPr>
@@ -5207,7 +5274,7 @@
       <p:grpSpPr/>
       <p:pic>
         <p:nvPicPr>
-          <p:cNvPr id="2" name="Picture 1" descr="16_required.png"/>
+          <p:cNvPr id="2" name="Picture 1" descr="16_premia.png"/>
           <p:cNvPicPr>
             <a:picLocks noChangeAspect="1"/>
           </p:cNvPicPr>
@@ -5249,7 +5316,7 @@
       <p:grpSpPr/>
       <p:pic>
         <p:nvPicPr>
-          <p:cNvPr id="2" name="Picture 1" descr="17_robust.png"/>
+          <p:cNvPr id="2" name="Picture 1" descr="17_required.png"/>
           <p:cNvPicPr>
             <a:picLocks noChangeAspect="1"/>
           </p:cNvPicPr>
@@ -5291,7 +5358,7 @@
       <p:grpSpPr/>
       <p:pic>
         <p:nvPicPr>
-          <p:cNvPr id="2" name="Picture 1" descr="18_extra.png"/>
+          <p:cNvPr id="2" name="Picture 1" descr="18_robust.png"/>
           <p:cNvPicPr>
             <a:picLocks noChangeAspect="1"/>
           </p:cNvPicPr>
@@ -5333,7 +5400,7 @@
       <p:grpSpPr/>
       <p:pic>
         <p:nvPicPr>
-          <p:cNvPr id="2" name="Picture 1" descr="19_models.png"/>
+          <p:cNvPr id="2" name="Picture 1" descr="19_extra.png"/>
           <p:cNvPicPr>
             <a:picLocks noChangeAspect="1"/>
           </p:cNvPicPr>
@@ -5417,7 +5484,7 @@
       <p:grpSpPr/>
       <p:pic>
         <p:nvPicPr>
-          <p:cNvPr id="2" name="Picture 1" descr="20_recs.png"/>
+          <p:cNvPr id="2" name="Picture 1" descr="20_models.png"/>
           <p:cNvPicPr>
             <a:picLocks noChangeAspect="1"/>
           </p:cNvPicPr>
@@ -5459,7 +5526,7 @@
       <p:grpSpPr/>
       <p:pic>
         <p:nvPicPr>
-          <p:cNvPr id="2" name="Picture 1" descr="21_concl.png"/>
+          <p:cNvPr id="2" name="Picture 1" descr="21_recs.png"/>
           <p:cNvPicPr>
             <a:picLocks noChangeAspect="1"/>
           </p:cNvPicPr>
@@ -5501,7 +5568,49 @@
       <p:grpSpPr/>
       <p:pic>
         <p:nvPicPr>
-          <p:cNvPr id="2" name="Picture 1" descr="22_limits.png"/>
+          <p:cNvPr id="2" name="Picture 1" descr="22_concl.png"/>
+          <p:cNvPicPr>
+            <a:picLocks noChangeAspect="1"/>
+          </p:cNvPicPr>
+          <p:nvPr/>
+        </p:nvPicPr>
+        <p:blipFill>
+          <a:blip r:embed="rId2"/>
+          <a:stretch>
+            <a:fillRect/>
+          </a:stretch>
+        </p:blipFill>
+        <p:spPr>
+          <a:xfrm>
+            <a:off x="0" y="0"/>
+            <a:ext cx="12192000" cy="6858000"/>
+          </a:xfrm>
+          <a:prstGeom prst="rect">
+            <a:avLst/>
+          </a:prstGeom>
+        </p:spPr>
+      </p:pic>
+    </p:spTree>
+  </p:cSld>
+  <p:clrMapOvr>
+    <a:masterClrMapping/>
+  </p:clrMapOvr>
+</p:sld>
+</file>
+
+<file path=ppt/slides/slide23.xml><?xml version="1.0" encoding="utf-8"?>
+<p:sld xmlns:a="http://schemas.openxmlformats.org/drawingml/2006/main" xmlns:p="http://schemas.openxmlformats.org/presentationml/2006/main" xmlns:r="http://schemas.openxmlformats.org/officeDocument/2006/relationships">
+  <p:cSld>
+    <p:spTree>
+      <p:nvGrpSpPr>
+        <p:cNvPr id="1" name=""/>
+        <p:cNvGrpSpPr/>
+        <p:nvPr/>
+      </p:nvGrpSpPr>
+      <p:grpSpPr/>
+      <p:pic>
+        <p:nvPicPr>
+          <p:cNvPr id="2" name="Picture 1" descr="23_limits.png"/>
           <p:cNvPicPr>
             <a:picLocks noChangeAspect="1"/>
           </p:cNvPicPr>
